--- a/yunqi-2026-pai-forum/docs/洞察一页-03-大模型后训练框架：从 LLM 到 VLA 的多模态扩展与.pptx
+++ b/yunqi-2026-pai-forum/docs/洞察一页-03-大模型后训练框架：从 LLM 到 VLA 的多模态扩展与.pptx
@@ -3141,7 +3141,7 @@
         <p:spPr>
           <a:xfrm>
             <a:off x="0" y="0"/>
-            <a:ext cx="12191695" cy="1051560"/>
+            <a:ext cx="12191695" cy="1097280"/>
           </a:xfrm>
           <a:prstGeom prst="rect">
             <a:avLst/>
@@ -3183,8 +3183,8 @@
         </p:nvSpPr>
         <p:spPr>
           <a:xfrm>
-            <a:off x="365760" y="146304"/>
-            <a:ext cx="11430000" cy="274320"/>
+            <a:off x="320040" y="91440"/>
+            <a:ext cx="11521440" cy="237744"/>
           </a:xfrm>
           <a:prstGeom prst="rect">
             <a:avLst/>
@@ -3199,7 +3199,7 @@
           <a:p>
             <a:pPr algn="l"/>
             <a:r>
-              <a:rPr sz="1300" b="0">
+              <a:rPr sz="1200" b="0">
                 <a:solidFill>
                   <a:srgbClr val="6B6B6B"/>
                 </a:solidFill>
@@ -3219,8 +3219,8 @@
         </p:nvSpPr>
         <p:spPr>
           <a:xfrm>
-            <a:off x="365760" y="420624"/>
-            <a:ext cx="11430000" cy="502920"/>
+            <a:off x="320040" y="347472"/>
+            <a:ext cx="11521440" cy="658368"/>
           </a:xfrm>
           <a:prstGeom prst="rect">
             <a:avLst/>
@@ -3235,7 +3235,7 @@
           <a:p>
             <a:pPr algn="l"/>
             <a:r>
-              <a:rPr sz="2000" b="1">
+              <a:rPr sz="1600" b="1">
                 <a:solidFill>
                   <a:srgbClr val="1A1A1A"/>
                 </a:solidFill>
@@ -3255,8 +3255,8 @@
         </p:nvSpPr>
         <p:spPr>
           <a:xfrm>
-            <a:off x="320040" y="1207008"/>
-            <a:ext cx="11521440" cy="502920"/>
+            <a:off x="274320" y="1207008"/>
+            <a:ext cx="11612880" cy="749808"/>
           </a:xfrm>
           <a:prstGeom prst="rect">
             <a:avLst/>
@@ -3300,8 +3300,8 @@
         </p:nvSpPr>
         <p:spPr>
           <a:xfrm>
-            <a:off x="457200" y="1298448"/>
-            <a:ext cx="11247120" cy="365760"/>
+            <a:off x="411480" y="1261872"/>
+            <a:ext cx="11338560" cy="640080"/>
           </a:xfrm>
           <a:prstGeom prst="rect">
             <a:avLst/>
@@ -3316,14 +3316,14 @@
           <a:p>
             <a:pPr algn="l"/>
             <a:r>
-              <a:rPr sz="1300" b="1">
+              <a:rPr sz="1200" b="1">
                 <a:solidFill>
                   <a:srgbClr val="1A1A1A"/>
                 </a:solidFill>
                 <a:latin typeface="Microsoft YaHei"/>
                 <a:ea typeface="Microsoft YaHei"/>
               </a:rPr>
-              <a:t>一句话判断：演讲指出模型竞争已进入「后训练系统能力」时代，关键变量从单次训练规模转向反馈闭环的速度、质量与可靠性。沿着 LLM→Agent→VLA 演进，把 RL 引擎定义为连接算法、模型、环境与算力的「反馈操作系统」，并给出全异…</a:t>
+              <a:t>一句话判断：演讲指出模型竞争已进入「后训练系统能力」时代，关键变量从单次训练规模转向反馈闭环的速度、质量与可靠性。沿着 LLM→Agent→VLA 演进，把 RL 引擎定义为连接算法、模型、环境与算力的「反馈操作系统」，并给出全异步流水线、版本边界、轨迹工厂、可观测回放以及 VLA 三重挑战的系统解法。</a:t>
             </a:r>
           </a:p>
         </p:txBody>
@@ -3336,8 +3336,8 @@
         </p:nvSpPr>
         <p:spPr>
           <a:xfrm>
-            <a:off x="320040" y="1874519"/>
-            <a:ext cx="3703320" cy="2606040"/>
+            <a:off x="274320" y="2084831"/>
+            <a:ext cx="3749039" cy="2267712"/>
           </a:xfrm>
           <a:prstGeom prst="rect">
             <a:avLst/>
@@ -3381,8 +3381,8 @@
         </p:nvSpPr>
         <p:spPr>
           <a:xfrm>
-            <a:off x="457200" y="2011679"/>
-            <a:ext cx="3429000" cy="320040"/>
+            <a:off x="402336" y="2176271"/>
+            <a:ext cx="3493007" cy="292608"/>
           </a:xfrm>
           <a:prstGeom prst="rect">
             <a:avLst/>
@@ -3397,14 +3397,14 @@
           <a:p>
             <a:pPr algn="l"/>
             <a:r>
-              <a:rPr sz="1500" b="1">
+              <a:rPr sz="1400" b="1">
                 <a:solidFill>
                   <a:srgbClr val="8B1A2B"/>
                 </a:solidFill>
                 <a:latin typeface="Microsoft YaHei"/>
                 <a:ea typeface="Microsoft YaHei"/>
               </a:rPr>
-              <a:t>01  后训练系统能力时代：反馈闭环决…</a:t>
+              <a:t>01  反馈闭环决定竞争力</a:t>
             </a:r>
           </a:p>
         </p:txBody>
@@ -3417,8 +3417,8 @@
         </p:nvSpPr>
         <p:spPr>
           <a:xfrm>
-            <a:off x="484632" y="2377439"/>
-            <a:ext cx="3374136" cy="1965960"/>
+            <a:off x="402336" y="2487167"/>
+            <a:ext cx="3493007" cy="1764792"/>
           </a:xfrm>
           <a:prstGeom prst="rect">
             <a:avLst/>
@@ -3433,28 +3433,45 @@
           <a:p>
             <a:pPr algn="l">
               <a:spcAft>
-                <a:spcPts val="400"/>
+                <a:spcPts val="200"/>
               </a:spcAft>
             </a:pPr>
             <a:r>
-              <a:rPr sz="1200" b="1">
+              <a:rPr sz="1100" b="1">
                 <a:solidFill>
                   <a:srgbClr val="1A1A1A"/>
                 </a:solidFill>
                 <a:latin typeface="Microsoft YaHei"/>
                 <a:ea typeface="Microsoft YaHei"/>
               </a:rPr>
-              <a:t>预训练决定知识底座，后训练决定模型能否真正完成任务，持续反馈让模型学会行动与适应</a:t>
+              <a:t>评估后训练产品时，应看闭环迭代吞吐与稳定性，而非仅看单次 SFT/RL 任务能否跑通。</a:t>
             </a:r>
           </a:p>
           <a:p>
             <a:pPr algn="l">
               <a:spcAft>
-                <a:spcPts val="400"/>
+                <a:spcPts val="200"/>
               </a:spcAft>
             </a:pPr>
             <a:r>
-              <a:rPr sz="1200" b="0">
+              <a:rPr sz="1100" b="0">
+                <a:solidFill>
+                  <a:srgbClr val="4A4A4A"/>
+                </a:solidFill>
+                <a:latin typeface="Microsoft YaHei"/>
+                <a:ea typeface="Microsoft YaHei"/>
+              </a:rPr>
+              <a:t>• 预训练决定知识底座，后训练决定模型能否真正完成任务，持续反馈让模型学会行动与适应</a:t>
+            </a:r>
+          </a:p>
+          <a:p>
+            <a:pPr algn="l">
+              <a:spcAft>
+                <a:spcPts val="200"/>
+              </a:spcAft>
+            </a:pPr>
+            <a:r>
+              <a:rPr sz="1100" b="0">
                 <a:solidFill>
                   <a:srgbClr val="4A4A4A"/>
                 </a:solidFill>
@@ -3474,8 +3491,8 @@
         </p:nvSpPr>
         <p:spPr>
           <a:xfrm>
-            <a:off x="4224528" y="1874519"/>
-            <a:ext cx="3703320" cy="2606040"/>
+            <a:off x="4187951" y="2084831"/>
+            <a:ext cx="3749039" cy="2267712"/>
           </a:xfrm>
           <a:prstGeom prst="rect">
             <a:avLst/>
@@ -3519,8 +3536,8 @@
         </p:nvSpPr>
         <p:spPr>
           <a:xfrm>
-            <a:off x="4361688" y="2011679"/>
-            <a:ext cx="3429000" cy="320040"/>
+            <a:off x="4315967" y="2176271"/>
+            <a:ext cx="3493007" cy="292608"/>
           </a:xfrm>
           <a:prstGeom prst="rect">
             <a:avLst/>
@@ -3535,14 +3552,14 @@
           <a:p>
             <a:pPr algn="l"/>
             <a:r>
-              <a:rPr sz="1500" b="1">
+              <a:rPr sz="1400" b="1">
                 <a:solidFill>
                   <a:srgbClr val="8B1A2B"/>
                 </a:solidFill>
                 <a:latin typeface="Microsoft YaHei"/>
                 <a:ea typeface="Microsoft YaHei"/>
               </a:rPr>
-              <a:t>02  能力演进：LLM → Agen…</a:t>
+              <a:t>02  LLM → Agent → VLA</a:t>
             </a:r>
           </a:p>
         </p:txBody>
@@ -3555,8 +3572,8 @@
         </p:nvSpPr>
         <p:spPr>
           <a:xfrm>
-            <a:off x="4389120" y="2377439"/>
-            <a:ext cx="3374136" cy="1965960"/>
+            <a:off x="4315967" y="2487167"/>
+            <a:ext cx="3493007" cy="1764792"/>
           </a:xfrm>
           <a:prstGeom prst="rect">
             <a:avLst/>
@@ -3571,28 +3588,45 @@
           <a:p>
             <a:pPr algn="l">
               <a:spcAft>
-                <a:spcPts val="400"/>
+                <a:spcPts val="200"/>
               </a:spcAft>
             </a:pPr>
             <a:r>
-              <a:rPr sz="1200" b="1">
+              <a:rPr sz="1100" b="1">
                 <a:solidFill>
                   <a:srgbClr val="1A1A1A"/>
                 </a:solidFill>
                 <a:latin typeface="Microsoft YaHei"/>
                 <a:ea typeface="Microsoft YaHei"/>
               </a:rPr>
-              <a:t>LLM：文本输入→生成答案，反馈为偏好/正确性</a:t>
+              <a:t>后训练框架接口需统一覆盖文本偏好、环境执行结果与物理反馈三类信号，避免为 VLA 另起一套不可复用系统。</a:t>
             </a:r>
           </a:p>
           <a:p>
             <a:pPr algn="l">
               <a:spcAft>
-                <a:spcPts val="400"/>
+                <a:spcPts val="200"/>
               </a:spcAft>
             </a:pPr>
             <a:r>
-              <a:rPr sz="1200" b="0">
+              <a:rPr sz="1100" b="0">
+                <a:solidFill>
+                  <a:srgbClr val="4A4A4A"/>
+                </a:solidFill>
+                <a:latin typeface="Microsoft YaHei"/>
+                <a:ea typeface="Microsoft YaHei"/>
+              </a:rPr>
+              <a:t>• LLM：文本输入→生成答案，反馈为偏好/正确性</a:t>
+            </a:r>
+          </a:p>
+          <a:p>
+            <a:pPr algn="l">
+              <a:spcAft>
+                <a:spcPts val="200"/>
+              </a:spcAft>
+            </a:pPr>
+            <a:r>
+              <a:rPr sz="1100" b="0">
                 <a:solidFill>
                   <a:srgbClr val="4A4A4A"/>
                 </a:solidFill>
@@ -3605,11 +3639,11 @@
           <a:p>
             <a:pPr algn="l">
               <a:spcAft>
-                <a:spcPts val="400"/>
+                <a:spcPts val="200"/>
               </a:spcAft>
             </a:pPr>
             <a:r>
-              <a:rPr sz="1200" b="0">
+              <a:rPr sz="1100" b="0">
                 <a:solidFill>
                   <a:srgbClr val="4A4A4A"/>
                 </a:solidFill>
@@ -3629,8 +3663,8 @@
         </p:nvSpPr>
         <p:spPr>
           <a:xfrm>
-            <a:off x="8129016" y="1874519"/>
-            <a:ext cx="3703320" cy="2606040"/>
+            <a:off x="8101582" y="2084831"/>
+            <a:ext cx="3749039" cy="2267712"/>
           </a:xfrm>
           <a:prstGeom prst="rect">
             <a:avLst/>
@@ -3674,8 +3708,8 @@
         </p:nvSpPr>
         <p:spPr>
           <a:xfrm>
-            <a:off x="8266176" y="2011679"/>
-            <a:ext cx="3429000" cy="320040"/>
+            <a:off x="8229598" y="2176271"/>
+            <a:ext cx="3493007" cy="292608"/>
           </a:xfrm>
           <a:prstGeom prst="rect">
             <a:avLst/>
@@ -3690,14 +3724,14 @@
           <a:p>
             <a:pPr algn="l"/>
             <a:r>
-              <a:rPr sz="1500" b="1">
+              <a:rPr sz="1400" b="1">
                 <a:solidFill>
                   <a:srgbClr val="8B1A2B"/>
                 </a:solidFill>
                 <a:latin typeface="Microsoft YaHei"/>
                 <a:ea typeface="Microsoft YaHei"/>
               </a:rPr>
-              <a:t>03  RL 引擎：反馈操作系统分层架构</a:t>
+              <a:t>03  反馈操作系统分层架构</a:t>
             </a:r>
           </a:p>
         </p:txBody>
@@ -3710,8 +3744,8 @@
         </p:nvSpPr>
         <p:spPr>
           <a:xfrm>
-            <a:off x="8293608" y="2377439"/>
-            <a:ext cx="3374136" cy="1965960"/>
+            <a:off x="8229598" y="2487167"/>
+            <a:ext cx="3493007" cy="1764792"/>
           </a:xfrm>
           <a:prstGeom prst="rect">
             <a:avLst/>
@@ -3726,28 +3760,45 @@
           <a:p>
             <a:pPr algn="l">
               <a:spcAft>
-                <a:spcPts val="400"/>
+                <a:spcPts val="200"/>
               </a:spcAft>
             </a:pPr>
             <a:r>
-              <a:rPr sz="1200" b="1">
+              <a:rPr sz="1100" b="1">
                 <a:solidFill>
                   <a:srgbClr val="1A1A1A"/>
                 </a:solidFill>
                 <a:latin typeface="Microsoft YaHei"/>
                 <a:ea typeface="Microsoft YaHei"/>
               </a:rPr>
-              <a:t>算法层：PPO / GRPO / GSPO / 自定义 Reward</a:t>
+              <a:t>应把 Rollout/Buffer/权重同步/容错沉淀为中间件，避免算法脚本与集群环境强绑定导致每次换模/换环境都重装系统。</a:t>
             </a:r>
           </a:p>
           <a:p>
             <a:pPr algn="l">
               <a:spcAft>
-                <a:spcPts val="400"/>
+                <a:spcPts val="200"/>
               </a:spcAft>
             </a:pPr>
             <a:r>
-              <a:rPr sz="1200" b="0">
+              <a:rPr sz="1100" b="0">
+                <a:solidFill>
+                  <a:srgbClr val="4A4A4A"/>
+                </a:solidFill>
+                <a:latin typeface="Microsoft YaHei"/>
+                <a:ea typeface="Microsoft YaHei"/>
+              </a:rPr>
+              <a:t>• 算法层：PPO / GRPO / GSPO / 自定义 Reward</a:t>
+            </a:r>
+          </a:p>
+          <a:p>
+            <a:pPr algn="l">
+              <a:spcAft>
+                <a:spcPts val="200"/>
+              </a:spcAft>
+            </a:pPr>
+            <a:r>
+              <a:rPr sz="1100" b="0">
                 <a:solidFill>
                   <a:srgbClr val="4A4A4A"/>
                 </a:solidFill>
@@ -3760,11 +3811,11 @@
           <a:p>
             <a:pPr algn="l">
               <a:spcAft>
-                <a:spcPts val="400"/>
+                <a:spcPts val="200"/>
               </a:spcAft>
             </a:pPr>
             <a:r>
-              <a:rPr sz="1200" b="0">
+              <a:rPr sz="1100" b="0">
                 <a:solidFill>
                   <a:srgbClr val="4A4A4A"/>
                 </a:solidFill>
@@ -3774,23 +3825,6 @@
               <a:t>• 算力层：GPU / PPU / CPU / 网络 / 存储</a:t>
             </a:r>
           </a:p>
-          <a:p>
-            <a:pPr algn="l">
-              <a:spcAft>
-                <a:spcPts val="400"/>
-              </a:spcAft>
-            </a:pPr>
-            <a:r>
-              <a:rPr sz="1200" b="0">
-                <a:solidFill>
-                  <a:srgbClr val="4A4A4A"/>
-                </a:solidFill>
-                <a:latin typeface="Microsoft YaHei"/>
-                <a:ea typeface="Microsoft YaHei"/>
-              </a:rPr>
-              <a:t>• 价值：算法只描述「学什么」，系统负责「如何高效稳定地学」</a:t>
-            </a:r>
-          </a:p>
         </p:txBody>
       </p:sp>
       <p:sp>
@@ -3801,8 +3835,8 @@
         </p:nvSpPr>
         <p:spPr>
           <a:xfrm>
-            <a:off x="320040" y="4617720"/>
-            <a:ext cx="7315200" cy="256032"/>
+            <a:off x="274320" y="4553712"/>
+            <a:ext cx="7315200" cy="237744"/>
           </a:xfrm>
           <a:prstGeom prst="rect">
             <a:avLst/>
@@ -3817,7 +3851,7 @@
           <a:p>
             <a:pPr algn="l"/>
             <a:r>
-              <a:rPr sz="1400" b="1">
+              <a:rPr sz="1300" b="1">
                 <a:solidFill>
                   <a:srgbClr val="1A1A1A"/>
                 </a:solidFill>
@@ -3837,8 +3871,8 @@
         </p:nvSpPr>
         <p:spPr>
           <a:xfrm>
-            <a:off x="320040" y="4910328"/>
-            <a:ext cx="1847088" cy="868680"/>
+            <a:off x="274320" y="4809744"/>
+            <a:ext cx="1874519" cy="960120"/>
           </a:xfrm>
           <a:prstGeom prst="rect">
             <a:avLst/>
@@ -3882,8 +3916,8 @@
         </p:nvSpPr>
         <p:spPr>
           <a:xfrm>
-            <a:off x="429768" y="4965192"/>
-            <a:ext cx="1664208" cy="201168"/>
+            <a:off x="365760" y="4864608"/>
+            <a:ext cx="1709927" cy="201168"/>
           </a:xfrm>
           <a:prstGeom prst="rect">
             <a:avLst/>
@@ -3905,7 +3939,7 @@
                 <a:latin typeface="Microsoft YaHei"/>
                 <a:ea typeface="Microsoft YaHei"/>
               </a:rPr>
-              <a:t>后训练系统能力时代：反…</a:t>
+              <a:t>反馈闭环决定竞争力</a:t>
             </a:r>
           </a:p>
         </p:txBody>
@@ -3918,8 +3952,8 @@
         </p:nvSpPr>
         <p:spPr>
           <a:xfrm>
-            <a:off x="429768" y="5166360"/>
-            <a:ext cx="1664208" cy="237744"/>
+            <a:off x="365760" y="5065776"/>
+            <a:ext cx="1709927" cy="256032"/>
           </a:xfrm>
           <a:prstGeom prst="rect">
             <a:avLst/>
@@ -3941,7 +3975,7 @@
                 <a:latin typeface="Microsoft YaHei"/>
                 <a:ea typeface="Microsoft YaHei"/>
               </a:rPr>
-              <a:t>预训练决定知识底座，后训练决定…</a:t>
+              <a:t>核心口径</a:t>
             </a:r>
           </a:p>
         </p:txBody>
@@ -3954,8 +3988,8 @@
         </p:nvSpPr>
         <p:spPr>
           <a:xfrm>
-            <a:off x="429768" y="5413248"/>
-            <a:ext cx="1664208" cy="292608"/>
+            <a:off x="365760" y="5340096"/>
+            <a:ext cx="1709927" cy="365760"/>
           </a:xfrm>
           <a:prstGeom prst="rect">
             <a:avLst/>
@@ -3970,14 +4004,14 @@
           <a:p>
             <a:pPr algn="l"/>
             <a:r>
-              <a:rPr sz="1400" b="1">
+              <a:rPr sz="1200" b="1">
                 <a:solidFill>
                   <a:srgbClr val="8B1A2B"/>
                 </a:solidFill>
                 <a:latin typeface="Microsoft YaHei"/>
                 <a:ea typeface="Microsoft YaHei"/>
               </a:rPr>
-              <a:t>预训练决定知识底座，后训练…</a:t>
+              <a:t>预训练决定知识底座，后训练决定模型能否真正完成任务</a:t>
             </a:r>
           </a:p>
         </p:txBody>
@@ -3990,8 +4024,8 @@
         </p:nvSpPr>
         <p:spPr>
           <a:xfrm>
-            <a:off x="2276856" y="4910328"/>
-            <a:ext cx="1847088" cy="868680"/>
+            <a:off x="2240279" y="4809744"/>
+            <a:ext cx="1874519" cy="960120"/>
           </a:xfrm>
           <a:prstGeom prst="rect">
             <a:avLst/>
@@ -4035,8 +4069,8 @@
         </p:nvSpPr>
         <p:spPr>
           <a:xfrm>
-            <a:off x="2386584" y="4965192"/>
-            <a:ext cx="1664208" cy="201168"/>
+            <a:off x="2331719" y="4864608"/>
+            <a:ext cx="1709927" cy="201168"/>
           </a:xfrm>
           <a:prstGeom prst="rect">
             <a:avLst/>
@@ -4058,7 +4092,7 @@
                 <a:latin typeface="Microsoft YaHei"/>
                 <a:ea typeface="Microsoft YaHei"/>
               </a:rPr>
-              <a:t>能力演进：LLM → …</a:t>
+              <a:t>能力演进</a:t>
             </a:r>
           </a:p>
         </p:txBody>
@@ -4071,8 +4105,8 @@
         </p:nvSpPr>
         <p:spPr>
           <a:xfrm>
-            <a:off x="2386584" y="5166360"/>
-            <a:ext cx="1664208" cy="237744"/>
+            <a:off x="2331719" y="5065776"/>
+            <a:ext cx="1709927" cy="256032"/>
           </a:xfrm>
           <a:prstGeom prst="rect">
             <a:avLst/>
@@ -4094,7 +4128,7 @@
                 <a:latin typeface="Microsoft YaHei"/>
                 <a:ea typeface="Microsoft YaHei"/>
               </a:rPr>
-              <a:t>LLM：文本输入→生成答案，反…</a:t>
+              <a:t>核心口径</a:t>
             </a:r>
           </a:p>
         </p:txBody>
@@ -4107,8 +4141,8 @@
         </p:nvSpPr>
         <p:spPr>
           <a:xfrm>
-            <a:off x="2386584" y="5413248"/>
-            <a:ext cx="1664208" cy="292608"/>
+            <a:off x="2331719" y="5340096"/>
+            <a:ext cx="1709927" cy="365760"/>
           </a:xfrm>
           <a:prstGeom prst="rect">
             <a:avLst/>
@@ -4123,14 +4157,14 @@
           <a:p>
             <a:pPr algn="l"/>
             <a:r>
-              <a:rPr sz="1400" b="1">
+              <a:rPr sz="1200" b="1">
                 <a:solidFill>
                   <a:srgbClr val="8B1A2B"/>
                 </a:solidFill>
                 <a:latin typeface="Microsoft YaHei"/>
                 <a:ea typeface="Microsoft YaHei"/>
               </a:rPr>
-              <a:t>LLM：文本输入→生成答案…</a:t>
+              <a:t>LLM：文本输入→生成答案，反馈为偏好/正确性</a:t>
             </a:r>
           </a:p>
         </p:txBody>
@@ -4143,8 +4177,8 @@
         </p:nvSpPr>
         <p:spPr>
           <a:xfrm>
-            <a:off x="4233672" y="4910328"/>
-            <a:ext cx="1847088" cy="868680"/>
+            <a:off x="4206238" y="4809744"/>
+            <a:ext cx="1874519" cy="960120"/>
           </a:xfrm>
           <a:prstGeom prst="rect">
             <a:avLst/>
@@ -4188,8 +4222,8 @@
         </p:nvSpPr>
         <p:spPr>
           <a:xfrm>
-            <a:off x="4343400" y="4965192"/>
-            <a:ext cx="1664208" cy="201168"/>
+            <a:off x="4297678" y="4864608"/>
+            <a:ext cx="1709927" cy="201168"/>
           </a:xfrm>
           <a:prstGeom prst="rect">
             <a:avLst/>
@@ -4211,7 +4245,7 @@
                 <a:latin typeface="Microsoft YaHei"/>
                 <a:ea typeface="Microsoft YaHei"/>
               </a:rPr>
-              <a:t>RL 引擎：反馈操作系…</a:t>
+              <a:t>反馈操作系统分层架构</a:t>
             </a:r>
           </a:p>
         </p:txBody>
@@ -4224,8 +4258,8 @@
         </p:nvSpPr>
         <p:spPr>
           <a:xfrm>
-            <a:off x="4343400" y="5166360"/>
-            <a:ext cx="1664208" cy="237744"/>
+            <a:off x="4297678" y="5065776"/>
+            <a:ext cx="1709927" cy="256032"/>
           </a:xfrm>
           <a:prstGeom prst="rect">
             <a:avLst/>
@@ -4247,7 +4281,7 @@
                 <a:latin typeface="Microsoft YaHei"/>
                 <a:ea typeface="Microsoft YaHei"/>
               </a:rPr>
-              <a:t>算法层：PPO / GRPO …</a:t>
+              <a:t>核心口径</a:t>
             </a:r>
           </a:p>
         </p:txBody>
@@ -4260,8 +4294,8 @@
         </p:nvSpPr>
         <p:spPr>
           <a:xfrm>
-            <a:off x="4343400" y="5413248"/>
-            <a:ext cx="1664208" cy="292608"/>
+            <a:off x="4297678" y="5340096"/>
+            <a:ext cx="1709927" cy="365760"/>
           </a:xfrm>
           <a:prstGeom prst="rect">
             <a:avLst/>
@@ -4276,14 +4310,14 @@
           <a:p>
             <a:pPr algn="l"/>
             <a:r>
-              <a:rPr sz="1400" b="1">
+              <a:rPr sz="1200" b="1">
                 <a:solidFill>
                   <a:srgbClr val="8B1A2B"/>
                 </a:solidFill>
                 <a:latin typeface="Microsoft YaHei"/>
                 <a:ea typeface="Microsoft YaHei"/>
               </a:rPr>
-              <a:t>算法层：PPO / GRP…</a:t>
+              <a:t>算法层：PPO / GRPO / GSPO / 自定义 Reward</a:t>
             </a:r>
           </a:p>
         </p:txBody>
@@ -4296,8 +4330,8 @@
         </p:nvSpPr>
         <p:spPr>
           <a:xfrm>
-            <a:off x="6190488" y="4910328"/>
-            <a:ext cx="1847088" cy="868680"/>
+            <a:off x="6172197" y="4809744"/>
+            <a:ext cx="1874519" cy="960120"/>
           </a:xfrm>
           <a:prstGeom prst="rect">
             <a:avLst/>
@@ -4341,8 +4375,8 @@
         </p:nvSpPr>
         <p:spPr>
           <a:xfrm>
-            <a:off x="6300216" y="4965192"/>
-            <a:ext cx="1664208" cy="201168"/>
+            <a:off x="6263637" y="4864608"/>
+            <a:ext cx="1709927" cy="201168"/>
           </a:xfrm>
           <a:prstGeom prst="rect">
             <a:avLst/>
@@ -4364,7 +4398,7 @@
                 <a:latin typeface="Microsoft YaHei"/>
                 <a:ea typeface="Microsoft YaHei"/>
               </a:rPr>
-              <a:t>RL 五段挑战与应对：…</a:t>
+              <a:t>调度到稳定性</a:t>
             </a:r>
           </a:p>
         </p:txBody>
@@ -4377,8 +4411,8 @@
         </p:nvSpPr>
         <p:spPr>
           <a:xfrm>
-            <a:off x="6300216" y="5166360"/>
-            <a:ext cx="1664208" cy="237744"/>
+            <a:off x="6263637" y="5065776"/>
+            <a:ext cx="1709927" cy="256032"/>
           </a:xfrm>
           <a:prstGeom prst="rect">
             <a:avLst/>
@@ -4400,7 +4434,7 @@
                 <a:latin typeface="Microsoft YaHei"/>
                 <a:ea typeface="Microsoft YaHei"/>
               </a:rPr>
-              <a:t>调度：轨迹长短不一导致空转 →…</a:t>
+              <a:t>核心口径</a:t>
             </a:r>
           </a:p>
         </p:txBody>
@@ -4413,8 +4447,8 @@
         </p:nvSpPr>
         <p:spPr>
           <a:xfrm>
-            <a:off x="6300216" y="5413248"/>
-            <a:ext cx="1664208" cy="292608"/>
+            <a:off x="6263637" y="5340096"/>
+            <a:ext cx="1709927" cy="365760"/>
           </a:xfrm>
           <a:prstGeom prst="rect">
             <a:avLst/>
@@ -4429,14 +4463,14 @@
           <a:p>
             <a:pPr algn="l"/>
             <a:r>
-              <a:rPr sz="1400" b="1">
+              <a:rPr sz="1200" b="1">
                 <a:solidFill>
                   <a:srgbClr val="8B1A2B"/>
                 </a:solidFill>
                 <a:latin typeface="Microsoft YaHei"/>
                 <a:ea typeface="Microsoft YaHei"/>
               </a:rPr>
-              <a:t>调度：轨迹长短不一导致空转…</a:t>
+              <a:t>调度：轨迹长短不一导致空转 → 版本感知全局调度 + 动态配比</a:t>
             </a:r>
           </a:p>
         </p:txBody>
@@ -4449,8 +4483,8 @@
         </p:nvSpPr>
         <p:spPr>
           <a:xfrm>
-            <a:off x="8147304" y="4910328"/>
-            <a:ext cx="1847088" cy="868680"/>
+            <a:off x="8138156" y="4809744"/>
+            <a:ext cx="1874519" cy="960120"/>
           </a:xfrm>
           <a:prstGeom prst="rect">
             <a:avLst/>
@@ -4494,8 +4528,8 @@
         </p:nvSpPr>
         <p:spPr>
           <a:xfrm>
-            <a:off x="8257032" y="4965192"/>
-            <a:ext cx="1664208" cy="201168"/>
+            <a:off x="8229596" y="4864608"/>
+            <a:ext cx="1709927" cy="201168"/>
           </a:xfrm>
           <a:prstGeom prst="rect">
             <a:avLst/>
@@ -4517,7 +4551,7 @@
                 <a:latin typeface="Microsoft YaHei"/>
                 <a:ea typeface="Microsoft YaHei"/>
               </a:rPr>
-              <a:t>突破一：全异步流水线打…</a:t>
+              <a:t>突破一</a:t>
             </a:r>
           </a:p>
         </p:txBody>
@@ -4530,8 +4564,8 @@
         </p:nvSpPr>
         <p:spPr>
           <a:xfrm>
-            <a:off x="8257032" y="5166360"/>
-            <a:ext cx="1664208" cy="237744"/>
+            <a:off x="8229596" y="5065776"/>
+            <a:ext cx="1709927" cy="256032"/>
           </a:xfrm>
           <a:prstGeom prst="rect">
             <a:avLst/>
@@ -4553,7 +4587,7 @@
                 <a:latin typeface="Microsoft YaHei"/>
                 <a:ea typeface="Microsoft YaHei"/>
               </a:rPr>
-              <a:t>同步架构：Rollout 与 …</a:t>
+              <a:t>核心口径</a:t>
             </a:r>
           </a:p>
         </p:txBody>
@@ -4566,8 +4600,8 @@
         </p:nvSpPr>
         <p:spPr>
           <a:xfrm>
-            <a:off x="8257032" y="5413248"/>
-            <a:ext cx="1664208" cy="292608"/>
+            <a:off x="8229596" y="5340096"/>
+            <a:ext cx="1709927" cy="365760"/>
           </a:xfrm>
           <a:prstGeom prst="rect">
             <a:avLst/>
@@ -4582,14 +4616,14 @@
           <a:p>
             <a:pPr algn="l"/>
             <a:r>
-              <a:rPr sz="1400" b="1">
+              <a:rPr sz="1200" b="1">
                 <a:solidFill>
                   <a:srgbClr val="8B1A2B"/>
                 </a:solidFill>
                 <a:latin typeface="Microsoft YaHei"/>
                 <a:ea typeface="Microsoft YaHei"/>
               </a:rPr>
-              <a:t>同步架构：Rollout …</a:t>
+              <a:t>同步架构：Rollout 与 Training 串行</a:t>
             </a:r>
           </a:p>
         </p:txBody>
@@ -4602,8 +4636,8 @@
         </p:nvSpPr>
         <p:spPr>
           <a:xfrm>
-            <a:off x="10104120" y="4910328"/>
-            <a:ext cx="1847088" cy="868680"/>
+            <a:off x="10104115" y="4809744"/>
+            <a:ext cx="1874519" cy="960120"/>
           </a:xfrm>
           <a:prstGeom prst="rect">
             <a:avLst/>
@@ -4647,8 +4681,8 @@
         </p:nvSpPr>
         <p:spPr>
           <a:xfrm>
-            <a:off x="10213848" y="4965192"/>
-            <a:ext cx="1664208" cy="201168"/>
+            <a:off x="10195555" y="4864608"/>
+            <a:ext cx="1709927" cy="201168"/>
           </a:xfrm>
           <a:prstGeom prst="rect">
             <a:avLst/>
@@ -4670,7 +4704,7 @@
                 <a:latin typeface="Microsoft YaHei"/>
                 <a:ea typeface="Microsoft YaHei"/>
               </a:rPr>
-              <a:t>异步可控：版本边界与 …</a:t>
+              <a:t>控制参数</a:t>
             </a:r>
           </a:p>
         </p:txBody>
@@ -4683,8 +4717,8 @@
         </p:nvSpPr>
         <p:spPr>
           <a:xfrm>
-            <a:off x="10213848" y="5166360"/>
-            <a:ext cx="1664208" cy="237744"/>
+            <a:off x="10195555" y="5065776"/>
+            <a:ext cx="1709927" cy="256032"/>
           </a:xfrm>
           <a:prstGeom prst="rect">
             <a:avLst/>
@@ -4706,7 +4740,7 @@
                 <a:latin typeface="Microsoft YaHei"/>
                 <a:ea typeface="Microsoft YaHei"/>
               </a:rPr>
-              <a:t>用 max_version_d…</a:t>
+              <a:t>演讲口径</a:t>
             </a:r>
           </a:p>
         </p:txBody>
@@ -4719,8 +4753,8 @@
         </p:nvSpPr>
         <p:spPr>
           <a:xfrm>
-            <a:off x="10213848" y="5413248"/>
-            <a:ext cx="1664208" cy="292608"/>
+            <a:off x="10195555" y="5340096"/>
+            <a:ext cx="1709927" cy="365760"/>
           </a:xfrm>
           <a:prstGeom prst="rect">
             <a:avLst/>
@@ -4735,14 +4769,14 @@
           <a:p>
             <a:pPr algn="l"/>
             <a:r>
-              <a:rPr sz="1400" b="1">
+              <a:rPr sz="1200" b="1">
                 <a:solidFill>
                   <a:srgbClr val="8B1A2B"/>
                 </a:solidFill>
                 <a:latin typeface="Microsoft YaHei"/>
                 <a:ea typeface="Microsoft YaHei"/>
               </a:rPr>
-              <a:t>控制参数：max_version_…</a:t>
+              <a:t>max_version_diff</a:t>
             </a:r>
           </a:p>
         </p:txBody>
@@ -4755,8 +4789,8 @@
         </p:nvSpPr>
         <p:spPr>
           <a:xfrm>
-            <a:off x="0" y="5989320"/>
-            <a:ext cx="12191695" cy="868680"/>
+            <a:off x="0" y="5870448"/>
+            <a:ext cx="12191695" cy="987552"/>
           </a:xfrm>
           <a:prstGeom prst="rect">
             <a:avLst/>
@@ -4798,8 +4832,8 @@
         </p:nvSpPr>
         <p:spPr>
           <a:xfrm>
-            <a:off x="365760" y="6080760"/>
-            <a:ext cx="11430000" cy="256032"/>
+            <a:off x="320040" y="5943600"/>
+            <a:ext cx="11521440" cy="502920"/>
           </a:xfrm>
           <a:prstGeom prst="rect">
             <a:avLst/>
@@ -4814,14 +4848,14 @@
           <a:p>
             <a:pPr algn="l"/>
             <a:r>
-              <a:rPr sz="1200" b="1">
+              <a:rPr sz="1100" b="1">
                 <a:solidFill>
                   <a:srgbClr val="1A1A1A"/>
                 </a:solidFill>
                 <a:latin typeface="Microsoft YaHei"/>
                 <a:ea typeface="Microsoft YaHei"/>
               </a:rPr>
-              <a:t>可落地动作：后训练竞争力在于反馈操作系统：异步流水、版本边界、轨迹工厂与全链路可观测。；从 LLM 到 VLA，环境与异构资源必须进入调度内核，而不是当作额外数据类型。</a:t>
+              <a:t>可落地动作：后训练竞争力在于反馈操作系统：异步流水、版本边界、轨迹工厂与全链路可观测；从 LLM 到 VLA，环境与异构资源必须进入调度内核，而不是当作额外数据类型；友商应优先建设训推分离、Eval 隔离与角色级诊断，才能支撑长轨迹 Agent 与物理反馈闭环。</a:t>
             </a:r>
           </a:p>
         </p:txBody>
@@ -4834,8 +4868,8 @@
         </p:nvSpPr>
         <p:spPr>
           <a:xfrm>
-            <a:off x="365760" y="6373368"/>
-            <a:ext cx="11430000" cy="256032"/>
+            <a:off x="320040" y="6437376"/>
+            <a:ext cx="11521440" cy="256032"/>
           </a:xfrm>
           <a:prstGeom prst="rect">
             <a:avLst/>
@@ -4850,7 +4884,7 @@
           <a:p>
             <a:pPr algn="l"/>
             <a:r>
-              <a:rPr sz="1000" b="0">
+              <a:rPr sz="900" b="0">
                 <a:solidFill>
                   <a:srgbClr val="6B6B6B"/>
                 </a:solidFill>
@@ -5092,7 +5126,7 @@
         <p:spPr>
           <a:xfrm>
             <a:off x="429768" y="1143000"/>
-            <a:ext cx="3496970" cy="292608"/>
+            <a:ext cx="3496970" cy="384048"/>
           </a:xfrm>
           <a:prstGeom prst="rect">
             <a:avLst/>
@@ -5114,7 +5148,7 @@
                 <a:latin typeface="Microsoft YaHei"/>
                 <a:ea typeface="Microsoft YaHei"/>
               </a:rPr>
-              <a:t>后训练系统能力时代：反馈闭环决定竞争力</a:t>
+              <a:t>反馈闭环决定竞争力</a:t>
             </a:r>
           </a:p>
         </p:txBody>
@@ -5135,7 +5169,7 @@
         </p:blipFill>
         <p:spPr>
           <a:xfrm>
-            <a:off x="429768" y="1928092"/>
+            <a:off x="429768" y="1946380"/>
             <a:ext cx="3496970" cy="2965239"/>
           </a:xfrm>
           <a:prstGeom prst="rect">
@@ -5233,7 +5267,7 @@
         <p:spPr>
           <a:xfrm>
             <a:off x="4347362" y="1143000"/>
-            <a:ext cx="3496970" cy="292608"/>
+            <a:ext cx="3496970" cy="384048"/>
           </a:xfrm>
           <a:prstGeom prst="rect">
             <a:avLst/>
@@ -5255,7 +5289,7 @@
                 <a:latin typeface="Microsoft YaHei"/>
                 <a:ea typeface="Microsoft YaHei"/>
               </a:rPr>
-              <a:t>能力演进：LLM → Agent → …</a:t>
+              <a:t>LLM → Agent → VLA</a:t>
             </a:r>
           </a:p>
         </p:txBody>
@@ -5276,7 +5310,7 @@
         </p:blipFill>
         <p:spPr>
           <a:xfrm>
-            <a:off x="4347362" y="1928092"/>
+            <a:off x="4347362" y="1946380"/>
             <a:ext cx="3496970" cy="2965239"/>
           </a:xfrm>
           <a:prstGeom prst="rect">
@@ -5374,7 +5408,7 @@
         <p:spPr>
           <a:xfrm>
             <a:off x="8264956" y="1143000"/>
-            <a:ext cx="3496970" cy="292608"/>
+            <a:ext cx="3496970" cy="384048"/>
           </a:xfrm>
           <a:prstGeom prst="rect">
             <a:avLst/>
@@ -5396,7 +5430,7 @@
                 <a:latin typeface="Microsoft YaHei"/>
                 <a:ea typeface="Microsoft YaHei"/>
               </a:rPr>
-              <a:t>RL 引擎：反馈操作系统分层架构</a:t>
+              <a:t>反馈操作系统分层架构</a:t>
             </a:r>
           </a:p>
         </p:txBody>
@@ -5417,7 +5451,7 @@
         </p:blipFill>
         <p:spPr>
           <a:xfrm>
-            <a:off x="8264956" y="1928092"/>
+            <a:off x="8264956" y="1946380"/>
             <a:ext cx="3496970" cy="2965239"/>
           </a:xfrm>
           <a:prstGeom prst="rect">

--- a/yunqi-2026-pai-forum/docs/洞察一页-03-大模型后训练框架：从 LLM 到 VLA 的多模态扩展与.pptx
+++ b/yunqi-2026-pai-forum/docs/洞察一页-03-大模型后训练框架：从 LLM 到 VLA 的多模态扩展与.pptx
@@ -3323,7 +3323,7 @@
                 <a:latin typeface="Microsoft YaHei"/>
                 <a:ea typeface="Microsoft YaHei"/>
               </a:rPr>
-              <a:t>一句话判断：演讲指出模型竞争已进入「后训练系统能力」时代，关键变量从单次训练规模转向反馈闭环的速度、质量与可靠性。沿着 LLM→Agent→VLA 演进，把 RL 引擎定义为连接算法、模型、环境与算力的「反馈操作系统」，并给出全异步流水线、版本边界、轨迹工厂、可观测回放以及 VLA 三重挑战的系统解法。</a:t>
+              <a:t>一句话判断：阿里云 从 LLM 到 VLA 的多模态扩展与实践——模型竞争已进入「后训练系统能力」时代，关键变量从单次训练规模转向反馈闭环的速度、质量与可靠性。沿着 LLM→Agent→VLA 演进，把 RL 引擎定义为连接算法、模型、环境与算力的「反馈操作系统」，并给出全异步流水线、版本边界、轨迹工厂、可观测回放以及 VLA 三重挑战的系统解法。</a:t>
             </a:r>
           </a:p>
         </p:txBody>
@@ -3771,7 +3771,7 @@
                 <a:latin typeface="Microsoft YaHei"/>
                 <a:ea typeface="Microsoft YaHei"/>
               </a:rPr>
-              <a:t>应把 Rollout/Buffer/权重同步/容错沉淀为中间件，避免算法脚本与集群环境强绑定导致每次换模/换环境都重装系统。</a:t>
+              <a:t>需要把 Rollout/Buffer/权重同步/容错沉淀为中间件，避免算法脚本与集群环境强绑定导致每次换模/换环境都重装系统。</a:t>
             </a:r>
           </a:p>
           <a:p>
@@ -3939,7 +3939,7 @@
                 <a:latin typeface="Microsoft YaHei"/>
                 <a:ea typeface="Microsoft YaHei"/>
               </a:rPr>
-              <a:t>反馈闭环决定竞争力</a:t>
+              <a:t>突破二</a:t>
             </a:r>
           </a:p>
         </p:txBody>
@@ -3975,7 +3975,7 @@
                 <a:latin typeface="Microsoft YaHei"/>
                 <a:ea typeface="Microsoft YaHei"/>
               </a:rPr>
-              <a:t>核心口径</a:t>
+              <a:t>关键能力</a:t>
             </a:r>
           </a:p>
         </p:txBody>
@@ -4011,7 +4011,7 @@
                 <a:latin typeface="Microsoft YaHei"/>
                 <a:ea typeface="Microsoft YaHei"/>
               </a:rPr>
-              <a:t>预训练决定知识底座，后训练决定模型能否真正完成任务</a:t>
+              <a:t>单条轨迹时长约 30 分钟~2 小时</a:t>
             </a:r>
           </a:p>
         </p:txBody>
@@ -4092,7 +4092,7 @@
                 <a:latin typeface="Microsoft YaHei"/>
                 <a:ea typeface="Microsoft YaHei"/>
               </a:rPr>
-              <a:t>能力演进</a:t>
+              <a:t>控制参数</a:t>
             </a:r>
           </a:p>
         </p:txBody>
@@ -4128,7 +4128,7 @@
                 <a:latin typeface="Microsoft YaHei"/>
                 <a:ea typeface="Microsoft YaHei"/>
               </a:rPr>
-              <a:t>核心口径</a:t>
+              <a:t>异步可控</a:t>
             </a:r>
           </a:p>
         </p:txBody>
@@ -4164,7 +4164,7 @@
                 <a:latin typeface="Microsoft YaHei"/>
                 <a:ea typeface="Microsoft YaHei"/>
               </a:rPr>
-              <a:t>LLM：文本输入→生成答案，反馈为偏好/正确性</a:t>
+              <a:t>max_version_diff</a:t>
             </a:r>
           </a:p>
         </p:txBody>
@@ -4245,7 +4245,7 @@
                 <a:latin typeface="Microsoft YaHei"/>
                 <a:ea typeface="Microsoft YaHei"/>
               </a:rPr>
-              <a:t>反馈操作系统分层架构</a:t>
+              <a:t>能力演进</a:t>
             </a:r>
           </a:p>
         </p:txBody>
@@ -4281,7 +4281,7 @@
                 <a:latin typeface="Microsoft YaHei"/>
                 <a:ea typeface="Microsoft YaHei"/>
               </a:rPr>
-              <a:t>核心口径</a:t>
+              <a:t>LLM：文本输入</a:t>
             </a:r>
           </a:p>
         </p:txBody>
@@ -4317,7 +4317,7 @@
                 <a:latin typeface="Microsoft YaHei"/>
                 <a:ea typeface="Microsoft YaHei"/>
               </a:rPr>
-              <a:t>算法层：PPO / GRPO / GSPO / 自定义 Reward</a:t>
+              <a:t>生成答案，反馈为偏好/正确性</a:t>
             </a:r>
           </a:p>
         </p:txBody>
@@ -4434,7 +4434,7 @@
                 <a:latin typeface="Microsoft YaHei"/>
                 <a:ea typeface="Microsoft YaHei"/>
               </a:rPr>
-              <a:t>核心口径</a:t>
+              <a:t>调度：轨迹长短不一导致空转</a:t>
             </a:r>
           </a:p>
         </p:txBody>
@@ -4470,7 +4470,7 @@
                 <a:latin typeface="Microsoft YaHei"/>
                 <a:ea typeface="Microsoft YaHei"/>
               </a:rPr>
-              <a:t>调度：轨迹长短不一导致空转 → 版本感知全局调度 + 动态配比</a:t>
+              <a:t>版本感知全局调度 + 动态配比</a:t>
             </a:r>
           </a:p>
         </p:txBody>
@@ -4551,7 +4551,7 @@
                 <a:latin typeface="Microsoft YaHei"/>
                 <a:ea typeface="Microsoft YaHei"/>
               </a:rPr>
-              <a:t>突破一</a:t>
+              <a:t>算法层</a:t>
             </a:r>
           </a:p>
         </p:txBody>
@@ -4587,7 +4587,7 @@
                 <a:latin typeface="Microsoft YaHei"/>
                 <a:ea typeface="Microsoft YaHei"/>
               </a:rPr>
-              <a:t>核心口径</a:t>
+              <a:t>反馈操作系统分层架构</a:t>
             </a:r>
           </a:p>
         </p:txBody>
@@ -4623,7 +4623,7 @@
                 <a:latin typeface="Microsoft YaHei"/>
                 <a:ea typeface="Microsoft YaHei"/>
               </a:rPr>
-              <a:t>同步架构：Rollout 与 Training 串行</a:t>
+              <a:t>PPO / GRPO / GSPO / 自定义 Reward</a:t>
             </a:r>
           </a:p>
         </p:txBody>
@@ -4704,7 +4704,7 @@
                 <a:latin typeface="Microsoft YaHei"/>
                 <a:ea typeface="Microsoft YaHei"/>
               </a:rPr>
-              <a:t>控制参数</a:t>
+              <a:t>反馈闭环决定竞争力</a:t>
             </a:r>
           </a:p>
         </p:txBody>
@@ -4740,7 +4740,7 @@
                 <a:latin typeface="Microsoft YaHei"/>
                 <a:ea typeface="Microsoft YaHei"/>
               </a:rPr>
-              <a:t>演讲口径</a:t>
+              <a:t>关键能力</a:t>
             </a:r>
           </a:p>
         </p:txBody>
@@ -4776,7 +4776,7 @@
                 <a:latin typeface="Microsoft YaHei"/>
                 <a:ea typeface="Microsoft YaHei"/>
               </a:rPr>
-              <a:t>max_version_diff</a:t>
+              <a:t>预训练决定知识底座，后训练决定模型能否真正完成任务</a:t>
             </a:r>
           </a:p>
         </p:txBody>
@@ -4855,7 +4855,7 @@
                 <a:latin typeface="Microsoft YaHei"/>
                 <a:ea typeface="Microsoft YaHei"/>
               </a:rPr>
-              <a:t>可落地动作：后训练竞争力在于反馈操作系统：异步流水、版本边界、轨迹工厂与全链路可观测；从 LLM 到 VLA，环境与异构资源必须进入调度内核，而不是当作额外数据类型；友商应优先建设训推分离、Eval 隔离与角色级诊断，才能支撑长轨迹 Agent 与物理反馈闭环。</a:t>
+              <a:t>启示要点：后训练竞争力在于反馈操作系统：异步流水、版本边界、轨迹工厂与全链路可观测；从 LLM 到 VLA，环境与异构资源必须进入调度内核，而不是当作额外数据类型；优先建设训推分离、Eval 隔离与角色级诊断，才能支撑长轨迹 Agent 与物理反馈闭环。</a:t>
             </a:r>
           </a:p>
         </p:txBody>
